--- a/system-design-101/vi/lessons/sd-11-025/slides/sd-11-025.pptx
+++ b/system-design-101/vi/lessons/sd-11-025/slides/sd-11-025.pptx
@@ -36,10 +36,6 @@
     <p:embeddedFont>
       <p:font typeface="Be Vietnam Pro SemiBold"/>
       <p:regular r:id="rId19"/>
-    </p:embeddedFont>
-    <p:embeddedFont>
-      <p:font typeface="Be Vietnam Pro ExtraBold"/>
-      <p:regular r:id="rId20"/>
     </p:embeddedFont>
   </p:embeddedFontLst>
   <p:defaultTextStyle>
@@ -3564,16 +3560,16 @@
         </p:nvSpPr>
         <p:spPr>
           <a:xfrm>
-            <a:off x="914400" y="3619500"/>
-            <a:ext cx="4572000" cy="1619250"/>
+            <a:off x="914400" y="3143250"/>
+            <a:ext cx="4572000" cy="1809750"/>
           </a:xfrm>
           <a:prstGeom prst="roundRect">
             <a:avLst>
-              <a:gd name="adj" fmla="val 14118"/>
+              <a:gd name="adj" fmla="val 12632"/>
             </a:avLst>
           </a:prstGeom>
           <a:solidFill>
-            <a:srgbClr val="F3DFB8"/>
+            <a:srgbClr val="FBE6C8"/>
           </a:solidFill>
           <a:ln w="28575">
             <a:solidFill>
@@ -3590,7 +3586,7 @@
               <a:buNone/>
             </a:pPr>
             <a:r>
-              <a:rPr lang="en-US" sz="2700" b="1" dirty="0" spc="-4" kern="0">
+              <a:rPr lang="en-US" sz="2700" b="1" dirty="0" spc="-16" kern="0">
                 <a:solidFill>
                   <a:srgbClr val="14161C"/>
                 </a:solidFill>
@@ -3598,10 +3594,10 @@
                 <a:ea typeface="Be Vietnam Pro" pitchFamily="34" charset="-122"/>
                 <a:cs typeface="Be Vietnam Pro" pitchFamily="34" charset="-120"/>
               </a:rPr>
-              <a:t>Thiết</a:t>
-            </a:r>
-            <a:r>
-              <a:rPr lang="en-US" sz="2700" b="1" dirty="0" spc="-1" kern="0">
+              <a:t>Máy</a:t>
+            </a:r>
+            <a:r>
+              <a:rPr lang="en-US" sz="2700" b="1" dirty="0" spc="-23" kern="0">
                 <a:solidFill>
                   <a:srgbClr val="14161C"/>
                 </a:solidFill>
@@ -3609,10 +3605,10 @@
                 <a:ea typeface="Be Vietnam Pro" pitchFamily="34" charset="-122"/>
                 <a:cs typeface="Be Vietnam Pro" pitchFamily="34" charset="-120"/>
               </a:rPr>
-              <a:t> lập</a:t>
-            </a:r>
-            <a:r>
-              <a:rPr lang="en-US" sz="2700" b="1" dirty="0" spc="0" kern="0">
+              <a:t> và</a:t>
+            </a:r>
+            <a:r>
+              <a:rPr lang="en-US" sz="2700" b="1" dirty="0" spc="-3" kern="0">
                 <a:solidFill>
                   <a:srgbClr val="14161C"/>
                 </a:solidFill>
@@ -3620,10 +3616,10 @@
                 <a:ea typeface="Be Vietnam Pro" pitchFamily="34" charset="-122"/>
                 <a:cs typeface="Be Vietnam Pro" pitchFamily="34" charset="-120"/>
               </a:rPr>
-              <a:t> ban</a:t>
-            </a:r>
-            <a:r>
-              <a:rPr lang="en-US" sz="2700" b="1" dirty="0" spc="8" kern="0">
+              <a:t> phần</a:t>
+            </a:r>
+            <a:r>
+              <a:rPr lang="en-US" sz="2700" b="1" dirty="0" spc="-11" kern="0">
                 <a:solidFill>
                   <a:srgbClr val="14161C"/>
                 </a:solidFill>
@@ -3631,10 +3627,10 @@
                 <a:ea typeface="Be Vietnam Pro" pitchFamily="34" charset="-122"/>
                 <a:cs typeface="Be Vietnam Pro" pitchFamily="34" charset="-120"/>
               </a:rPr>
-              <a:t> đầu</a:t>
-            </a:r>
-            <a:r>
-              <a:rPr lang="en-US" sz="2700" b="1" dirty="0" spc="-3" kern="0">
+              <a:t> mềm</a:t>
+            </a:r>
+            <a:r>
+              <a:rPr lang="en-US" sz="2700" b="1" dirty="0" spc="6" kern="0">
                 <a:solidFill>
                   <a:srgbClr val="14161C"/>
                 </a:solidFill>
@@ -3642,10 +3638,10 @@
                 <a:ea typeface="Be Vietnam Pro" pitchFamily="34" charset="-122"/>
                 <a:cs typeface="Be Vietnam Pro" pitchFamily="34" charset="-120"/>
               </a:rPr>
-              <a:t> bằng</a:t>
-            </a:r>
-            <a:r>
-              <a:rPr lang="en-US" sz="2700" b="1" dirty="0" spc="-15" kern="0">
+              <a:t> đã</a:t>
+            </a:r>
+            <a:r>
+              <a:rPr lang="en-US" sz="2700" b="1" dirty="0" spc="-7" kern="0">
                 <a:solidFill>
                   <a:srgbClr val="14161C"/>
                 </a:solidFill>
@@ -3653,7 +3649,7 @@
                 <a:ea typeface="Be Vietnam Pro" pitchFamily="34" charset="-122"/>
                 <a:cs typeface="Be Vietnam Pro" pitchFamily="34" charset="-120"/>
               </a:rPr>
-              <a:t> tay</a:t>
+              <a:t> có</a:t>
             </a:r>
             <a:endParaRPr lang="en-US" sz="2700" dirty="0"/>
           </a:p>
@@ -3667,16 +3663,16 @@
         </p:nvSpPr>
         <p:spPr>
           <a:xfrm>
-            <a:off x="6858000" y="3619500"/>
-            <a:ext cx="4572000" cy="1619250"/>
+            <a:off x="6858000" y="3143250"/>
+            <a:ext cx="4572000" cy="1809750"/>
           </a:xfrm>
           <a:prstGeom prst="roundRect">
             <a:avLst>
-              <a:gd name="adj" fmla="val 14118"/>
+              <a:gd name="adj" fmla="val 12632"/>
             </a:avLst>
           </a:prstGeom>
           <a:solidFill>
-            <a:srgbClr val="F3DFB8"/>
+            <a:srgbClr val="FBE6C8"/>
           </a:solidFill>
           <a:ln w="28575">
             <a:solidFill>
@@ -3693,7 +3689,7 @@
               <a:buNone/>
             </a:pPr>
             <a:r>
-              <a:rPr lang="en-US" sz="2700" b="1" dirty="0" spc="2" kern="0">
+              <a:rPr lang="en-US" sz="2400" b="1" dirty="0" spc="-5" kern="0">
                 <a:solidFill>
                   <a:srgbClr val="14161C"/>
                 </a:solidFill>
@@ -3701,10 +3697,10 @@
                 <a:ea typeface="Be Vietnam Pro" pitchFamily="34" charset="-122"/>
                 <a:cs typeface="Be Vietnam Pro" pitchFamily="34" charset="-120"/>
               </a:rPr>
-              <a:t>Đổi</a:t>
-            </a:r>
-            <a:r>
-              <a:rPr lang="en-US" sz="2700" b="1" dirty="0" spc="-3" kern="0">
+              <a:t>Puppet,</a:t>
+            </a:r>
+            <a:r>
+              <a:rPr lang="en-US" sz="2400" b="1" dirty="0" spc="-9" kern="0">
                 <a:solidFill>
                   <a:srgbClr val="14161C"/>
                 </a:solidFill>
@@ -3712,10 +3708,10 @@
                 <a:ea typeface="Be Vietnam Pro" pitchFamily="34" charset="-122"/>
                 <a:cs typeface="Be Vietnam Pro" pitchFamily="34" charset="-120"/>
               </a:rPr>
-              <a:t> bằng</a:t>
-            </a:r>
-            <a:r>
-              <a:rPr lang="en-US" sz="2700" b="1" dirty="0" spc="-4" kern="0">
+              <a:t> Chef,</a:t>
+            </a:r>
+            <a:r>
+              <a:rPr lang="en-US" sz="2400" b="1" dirty="0" spc="-4" kern="0">
                 <a:solidFill>
                   <a:srgbClr val="14161C"/>
                 </a:solidFill>
@@ -3723,10 +3719,10 @@
                 <a:ea typeface="Be Vietnam Pro" pitchFamily="34" charset="-122"/>
                 <a:cs typeface="Be Vietnam Pro" pitchFamily="34" charset="-120"/>
               </a:rPr>
-              <a:t> lệnh</a:t>
-            </a:r>
-            <a:r>
-              <a:rPr lang="en-US" sz="2700" b="1" dirty="0" spc="24" kern="0">
+              <a:t> Ansible cũng</a:t>
+            </a:r>
+            <a:r>
+              <a:rPr lang="en-US" sz="2400" b="1" dirty="0" spc="-1" kern="0">
                 <a:solidFill>
                   <a:srgbClr val="14161C"/>
                 </a:solidFill>
@@ -3734,10 +3730,10 @@
                 <a:ea typeface="Be Vietnam Pro" pitchFamily="34" charset="-122"/>
                 <a:cs typeface="Be Vietnam Pro" pitchFamily="34" charset="-120"/>
               </a:rPr>
-              <a:t> từng</a:t>
-            </a:r>
-            <a:r>
-              <a:rPr lang="en-US" sz="2700" b="1" dirty="0" spc="11" kern="0">
+              <a:t> khai</a:t>
+            </a:r>
+            <a:r>
+              <a:rPr lang="en-US" sz="2400" b="1" dirty="0" spc="4" kern="0">
                 <a:solidFill>
                   <a:srgbClr val="14161C"/>
                 </a:solidFill>
@@ -3745,9 +3741,20 @@
                 <a:ea typeface="Be Vietnam Pro" pitchFamily="34" charset="-122"/>
                 <a:cs typeface="Be Vietnam Pro" pitchFamily="34" charset="-120"/>
               </a:rPr>
-              <a:t> bước</a:t>
-            </a:r>
-            <a:endParaRPr lang="en-US" sz="2700" dirty="0"/>
+              <a:t> báo</a:t>
+            </a:r>
+            <a:r>
+              <a:rPr lang="en-US" sz="2400" b="1" dirty="0" spc="10" kern="0">
+                <a:solidFill>
+                  <a:srgbClr val="14161C"/>
+                </a:solidFill>
+                <a:latin typeface="Be Vietnam Pro" pitchFamily="34" charset="0"/>
+                <a:ea typeface="Be Vietnam Pro" pitchFamily="34" charset="-122"/>
+                <a:cs typeface="Be Vietnam Pro" pitchFamily="34" charset="-120"/>
+              </a:rPr>
+              <a:t> được</a:t>
+            </a:r>
+            <a:endParaRPr lang="en-US" sz="2400" dirty="0"/>
           </a:p>
         </p:txBody>
       </p:sp>
@@ -3759,16 +3766,16 @@
         </p:nvSpPr>
         <p:spPr>
           <a:xfrm>
-            <a:off x="12801600" y="3619500"/>
-            <a:ext cx="4572000" cy="1619250"/>
+            <a:off x="12801600" y="3143250"/>
+            <a:ext cx="4572000" cy="1809750"/>
           </a:xfrm>
           <a:prstGeom prst="roundRect">
             <a:avLst>
-              <a:gd name="adj" fmla="val 14118"/>
+              <a:gd name="adj" fmla="val 12632"/>
             </a:avLst>
           </a:prstGeom>
           <a:solidFill>
-            <a:srgbClr val="F3DFB8"/>
+            <a:srgbClr val="FBE6C8"/>
           </a:solidFill>
           <a:ln w="28575">
             <a:solidFill>
@@ -3845,13 +3852,13 @@
       </p:sp>
       <p:sp>
         <p:nvSpPr>
-          <p:cNvPr id="7" name="Connector line-1792421641823-309369921"/>
-          <p:cNvSpPr/>
-          <p:nvPr/>
-        </p:nvSpPr>
-        <p:spPr>
-          <a:xfrm>
-            <a:off x="5486400" y="4429125"/>
+          <p:cNvPr id="7" name="Connector line-1792424117040-186862791"/>
+          <p:cNvSpPr/>
+          <p:nvPr/>
+        </p:nvSpPr>
+        <p:spPr>
+          <a:xfrm>
+            <a:off x="5486400" y="4048125"/>
             <a:ext cx="1371600" cy="0"/>
           </a:xfrm>
           <a:prstGeom prst="line">
@@ -3870,13 +3877,13 @@
       </p:sp>
       <p:sp>
         <p:nvSpPr>
-          <p:cNvPr id="8" name="Connector line-1792421641824-275440236"/>
-          <p:cNvSpPr/>
-          <p:nvPr/>
-        </p:nvSpPr>
-        <p:spPr>
-          <a:xfrm>
-            <a:off x="11430000" y="4429125"/>
+          <p:cNvPr id="8" name="Connector line-1792424117041-978296236"/>
+          <p:cNvSpPr/>
+          <p:nvPr/>
+        </p:nvSpPr>
+        <p:spPr>
+          <a:xfrm>
+            <a:off x="11430000" y="4048125"/>
             <a:ext cx="1371600" cy="0"/>
           </a:xfrm>
           <a:prstGeom prst="line">
@@ -3901,12 +3908,12 @@
         </p:nvSpPr>
         <p:spPr>
           <a:xfrm>
-            <a:off x="914400" y="6477000"/>
-            <a:ext cx="16459200" cy="1143000"/>
+            <a:off x="914400" y="5905500"/>
+            <a:ext cx="16459200" cy="1047750"/>
           </a:xfrm>
           <a:prstGeom prst="roundRect">
             <a:avLst>
-              <a:gd name="adj" fmla="val 20000"/>
+              <a:gd name="adj" fmla="val 21818"/>
             </a:avLst>
           </a:prstGeom>
           <a:solidFill>
@@ -3923,8 +3930,8 @@
         </p:nvSpPr>
         <p:spPr>
           <a:xfrm>
-            <a:off x="1333500" y="6477000"/>
-            <a:ext cx="15621000" cy="1143000"/>
+            <a:off x="1333500" y="5905500"/>
+            <a:ext cx="15621000" cy="1047750"/>
           </a:xfrm>
           <a:prstGeom prst="rect">
             <a:avLst/>
@@ -3940,7 +3947,7 @@
               <a:buNone/>
             </a:pPr>
             <a:r>
-              <a:rPr lang="en-US" sz="2850" dirty="0" spc="1" kern="0">
+              <a:rPr lang="en-US" sz="2700" dirty="0" spc="-3" kern="0">
                 <a:solidFill>
                   <a:srgbClr val="14161C"/>
                 </a:solidFill>
@@ -3948,10 +3955,10 @@
                 <a:ea typeface="Be Vietnam Pro SemiBold" pitchFamily="34" charset="-122"/>
                 <a:cs typeface="Be Vietnam Pro SemiBold" pitchFamily="34" charset="-120"/>
               </a:rPr>
-              <a:t>Mục:</a:t>
-            </a:r>
-            <a:r>
-              <a:rPr lang="en-US" sz="2850" dirty="0" spc="-9" kern="0">
+              <a:t>Phạm</a:t>
+            </a:r>
+            <a:r>
+              <a:rPr lang="en-US" sz="2700" dirty="0" spc="-2" kern="0">
                 <a:solidFill>
                   <a:srgbClr val="14161C"/>
                 </a:solidFill>
@@ -3959,10 +3966,10 @@
                 <a:ea typeface="Be Vietnam Pro SemiBold" pitchFamily="34" charset="-122"/>
                 <a:cs typeface="Be Vietnam Pro SemiBold" pitchFamily="34" charset="-120"/>
               </a:rPr>
-              <a:t> máy</a:t>
-            </a:r>
-            <a:r>
-              <a:rPr lang="en-US" sz="2850" dirty="0" spc="1" kern="0">
+              <a:t> vi: cấu</a:t>
+            </a:r>
+            <a:r>
+              <a:rPr lang="en-US" sz="2700" dirty="0" spc="-3" kern="0">
                 <a:solidFill>
                   <a:srgbClr val="14161C"/>
                 </a:solidFill>
@@ -3970,10 +3977,10 @@
                 <a:ea typeface="Be Vietnam Pro SemiBold" pitchFamily="34" charset="-122"/>
                 <a:cs typeface="Be Vietnam Pro SemiBold" pitchFamily="34" charset="-120"/>
               </a:rPr>
-              <a:t> chủ,</a:t>
-            </a:r>
-            <a:r>
-              <a:rPr lang="en-US" sz="2850" dirty="0" spc="-4" kern="0">
+              <a:t> hình</a:t>
+            </a:r>
+            <a:r>
+              <a:rPr lang="en-US" sz="2700" dirty="0" spc="-13" kern="0">
                 <a:solidFill>
                   <a:srgbClr val="14161C"/>
                 </a:solidFill>
@@ -3981,10 +3988,10 @@
                 <a:ea typeface="Be Vietnam Pro SemiBold" pitchFamily="34" charset="-122"/>
                 <a:cs typeface="Be Vietnam Pro SemiBold" pitchFamily="34" charset="-120"/>
               </a:rPr>
-              <a:t> thiết</a:t>
-            </a:r>
-            <a:r>
-              <a:rPr lang="en-US" sz="2850" dirty="0" spc="2" kern="0">
+              <a:t> máy</a:t>
+            </a:r>
+            <a:r>
+              <a:rPr lang="en-US" sz="2700" dirty="0" spc="-25" kern="0">
                 <a:solidFill>
                   <a:srgbClr val="14161C"/>
                 </a:solidFill>
@@ -3992,10 +3999,10 @@
                 <a:ea typeface="Be Vietnam Pro SemiBold" pitchFamily="34" charset="-122"/>
                 <a:cs typeface="Be Vietnam Pro SemiBold" pitchFamily="34" charset="-120"/>
               </a:rPr>
-              <a:t> bị</a:t>
-            </a:r>
-            <a:r>
-              <a:rPr lang="en-US" sz="2850" dirty="0" spc="-2" kern="0">
+              <a:t> và</a:t>
+            </a:r>
+            <a:r>
+              <a:rPr lang="en-US" sz="2700" dirty="0" spc="-5" kern="0">
                 <a:solidFill>
                   <a:srgbClr val="14161C"/>
                 </a:solidFill>
@@ -4003,10 +4010,10 @@
                 <a:ea typeface="Be Vietnam Pro SemiBold" pitchFamily="34" charset="-122"/>
                 <a:cs typeface="Be Vietnam Pro SemiBold" pitchFamily="34" charset="-120"/>
               </a:rPr>
-              <a:t> mạng,</a:t>
-            </a:r>
-            <a:r>
-              <a:rPr lang="en-US" sz="2850" dirty="0" spc="32" kern="0">
+              <a:t> phần mềm</a:t>
+            </a:r>
+            <a:r>
+              <a:rPr lang="en-US" sz="2700" dirty="0" spc="-7" kern="0">
                 <a:solidFill>
                   <a:srgbClr val="14161C"/>
                 </a:solidFill>
@@ -4014,10 +4021,10 @@
                 <a:ea typeface="Be Vietnam Pro SemiBold" pitchFamily="34" charset="-122"/>
                 <a:cs typeface="Be Vietnam Pro SemiBold" pitchFamily="34" charset="-120"/>
               </a:rPr>
-              <a:t> ứng</a:t>
-            </a:r>
-            <a:r>
-              <a:rPr lang="en-US" sz="2850" dirty="0" spc="-1" kern="0">
+              <a:t> có</a:t>
+            </a:r>
+            <a:r>
+              <a:rPr lang="en-US" sz="2700" dirty="0" spc="-4" kern="0">
                 <a:solidFill>
                   <a:srgbClr val="14161C"/>
                 </a:solidFill>
@@ -4025,9 +4032,9 @@
                 <a:ea typeface="Be Vietnam Pro SemiBold" pitchFamily="34" charset="-122"/>
                 <a:cs typeface="Be Vietnam Pro SemiBold" pitchFamily="34" charset="-120"/>
               </a:rPr>
-              <a:t> dụng.</a:t>
-            </a:r>
-            <a:endParaRPr lang="en-US" sz="2850" dirty="0"/>
+              <a:t> sẵn.</a:t>
+            </a:r>
+            <a:endParaRPr lang="en-US" sz="2700" dirty="0"/>
           </a:p>
         </p:txBody>
       </p:sp>
@@ -4603,12 +4610,12 @@
         </p:nvSpPr>
         <p:spPr>
           <a:xfrm>
-            <a:off x="914400" y="3143250"/>
-            <a:ext cx="8001000" cy="4953000"/>
+            <a:off x="914400" y="3238500"/>
+            <a:ext cx="8001000" cy="4762500"/>
           </a:xfrm>
           <a:prstGeom prst="roundRect">
             <a:avLst>
-              <a:gd name="adj" fmla="val 5385"/>
+              <a:gd name="adj" fmla="val 5600"/>
             </a:avLst>
           </a:prstGeom>
           <a:solidFill>
@@ -4624,14 +4631,14 @@
       </p:sp>
       <p:sp>
         <p:nvSpPr>
-          <p:cNvPr id="5" name="Text 3"/>
-          <p:cNvSpPr/>
-          <p:nvPr/>
-        </p:nvSpPr>
-        <p:spPr>
-          <a:xfrm>
-            <a:off x="1333500" y="3524250"/>
-            <a:ext cx="7239000" cy="533400"/>
+          <p:cNvPr id="5" name="Text richtext-1792424127415-529772245"/>
+          <p:cNvSpPr/>
+          <p:nvPr/>
+        </p:nvSpPr>
+        <p:spPr>
+          <a:xfrm>
+            <a:off x="1295400" y="3524250"/>
+            <a:ext cx="7239000" cy="4191000"/>
           </a:xfrm>
           <a:prstGeom prst="rect">
             <a:avLst/>
@@ -4647,70 +4654,42 @@
               <a:buNone/>
             </a:pPr>
             <a:r>
-              <a:rPr lang="en-US" sz="2850" dirty="0" spc="3" kern="0">
+              <a:rPr lang="en-US" sz="2700" b="1" dirty="0" spc="5" kern="0">
                 <a:solidFill>
                   <a:srgbClr val="FFB454"/>
                 </a:solidFill>
-                <a:latin typeface="Be Vietnam Pro ExtraBold" pitchFamily="34" charset="0"/>
-                <a:ea typeface="Be Vietnam Pro ExtraBold" pitchFamily="34" charset="-122"/>
-                <a:cs typeface="Be Vietnam Pro ExtraBold" pitchFamily="34" charset="-120"/>
-              </a:rPr>
-              <a:t>Quản lý</a:t>
-            </a:r>
-            <a:r>
-              <a:rPr lang="en-US" sz="2850" dirty="0" spc="1" kern="0">
+                <a:latin typeface="Be Vietnam Pro" pitchFamily="34" charset="0"/>
+                <a:ea typeface="Be Vietnam Pro" pitchFamily="34" charset="-122"/>
+                <a:cs typeface="Be Vietnam Pro" pitchFamily="34" charset="-120"/>
+              </a:rPr>
+              <a:t>Quản</a:t>
+            </a:r>
+            <a:r>
+              <a:rPr lang="en-US" sz="2700" b="1" dirty="0" spc="-1" kern="0">
                 <a:solidFill>
                   <a:srgbClr val="FFB454"/>
                 </a:solidFill>
-                <a:latin typeface="Be Vietnam Pro ExtraBold" pitchFamily="34" charset="0"/>
-                <a:ea typeface="Be Vietnam Pro ExtraBold" pitchFamily="34" charset="-122"/>
-                <a:cs typeface="Be Vietnam Pro ExtraBold" pitchFamily="34" charset="-120"/>
-              </a:rPr>
-              <a:t> cấu</a:t>
-            </a:r>
-            <a:r>
-              <a:rPr lang="en-US" sz="2850" dirty="0" spc="0" kern="0">
+                <a:latin typeface="Be Vietnam Pro" pitchFamily="34" charset="0"/>
+                <a:ea typeface="Be Vietnam Pro" pitchFamily="34" charset="-122"/>
+                <a:cs typeface="Be Vietnam Pro" pitchFamily="34" charset="-120"/>
+              </a:rPr>
+              <a:t> lý cấu</a:t>
+            </a:r>
+            <a:r>
+              <a:rPr lang="en-US" sz="2700" b="1" dirty="0" spc="2" kern="0">
                 <a:solidFill>
                   <a:srgbClr val="FFB454"/>
                 </a:solidFill>
-                <a:latin typeface="Be Vietnam Pro ExtraBold" pitchFamily="34" charset="0"/>
-                <a:ea typeface="Be Vietnam Pro ExtraBold" pitchFamily="34" charset="-122"/>
-                <a:cs typeface="Be Vietnam Pro ExtraBold" pitchFamily="34" charset="-120"/>
+                <a:latin typeface="Be Vietnam Pro" pitchFamily="34" charset="0"/>
+                <a:ea typeface="Be Vietnam Pro" pitchFamily="34" charset="-122"/>
+                <a:cs typeface="Be Vietnam Pro" pitchFamily="34" charset="-120"/>
               </a:rPr>
               <a:t> hình</a:t>
             </a:r>
-            <a:endParaRPr lang="en-US" sz="2850" dirty="0"/>
+            <a:endParaRPr lang="en-US" sz="2700" dirty="0"/>
           </a:p>
-        </p:txBody>
-      </p:sp>
-      <p:sp>
-        <p:nvSpPr>
-          <p:cNvPr id="6" name="Text richtext-1792421642957-27674276"/>
-          <p:cNvSpPr/>
-          <p:nvPr/>
-        </p:nvSpPr>
-        <p:spPr>
-          <a:xfrm>
-            <a:off x="1333500" y="4381500"/>
-            <a:ext cx="7239000" cy="3429000"/>
-          </a:xfrm>
-          <a:prstGeom prst="rect">
-            <a:avLst/>
-          </a:prstGeom>
-          <a:noFill/>
-          <a:ln/>
-        </p:spPr>
-        <p:txBody>
-          <a:bodyPr wrap="square" lIns="0" tIns="14573" rIns="0" bIns="-14573" rtlCol="0" anchor="t"/>
-          <a:lstStyle/>
           <a:p>
             <a:pPr algn="l" marL="342900" indent="-244981">
-              <a:lnSpc>
-                <a:spcPts val="3510"/>
-              </a:lnSpc>
-              <a:spcAft>
-                <a:spcPts val="1500"/>
-              </a:spcAft>
               <a:buSzPct val="100000"/>
               <a:buFont typeface="Arial"/>
               <a:buChar char="•"/>
@@ -4718,7 +4697,7 @@
             <a:r>
               <a:rPr lang="en-US" sz="2700" dirty="0" spc="-1" kern="0">
                 <a:solidFill>
-                  <a:srgbClr val="E4E1D8"/>
+                  <a:srgbClr val="F3EEE3"/>
                 </a:solidFill>
                 <a:latin typeface="Be Vietnam Pro" pitchFamily="34" charset="0"/>
                 <a:ea typeface="Be Vietnam Pro" pitchFamily="34" charset="-122"/>
@@ -4729,7 +4708,7 @@
             <a:r>
               <a:rPr lang="en-US" sz="2700" dirty="0" spc="-19" kern="0">
                 <a:solidFill>
-                  <a:srgbClr val="E4E1D8"/>
+                  <a:srgbClr val="F3EEE3"/>
                 </a:solidFill>
                 <a:latin typeface="Be Vietnam Pro" pitchFamily="34" charset="0"/>
                 <a:ea typeface="Be Vietnam Pro" pitchFamily="34" charset="-122"/>
@@ -4740,7 +4719,7 @@
             <a:r>
               <a:rPr lang="en-US" sz="2700" dirty="0" spc="0" kern="0">
                 <a:solidFill>
-                  <a:srgbClr val="E4E1D8"/>
+                  <a:srgbClr val="F3EEE3"/>
                 </a:solidFill>
                 <a:latin typeface="Be Vietnam Pro" pitchFamily="34" charset="0"/>
                 <a:ea typeface="Be Vietnam Pro" pitchFamily="34" charset="-122"/>
@@ -4751,7 +4730,7 @@
             <a:r>
               <a:rPr lang="en-US" sz="2700" dirty="0" spc="2" kern="0">
                 <a:solidFill>
-                  <a:srgbClr val="E4E1D8"/>
+                  <a:srgbClr val="F3EEE3"/>
                 </a:solidFill>
                 <a:latin typeface="Be Vietnam Pro" pitchFamily="34" charset="0"/>
                 <a:ea typeface="Be Vietnam Pro" pitchFamily="34" charset="-122"/>
@@ -4762,7 +4741,7 @@
             <a:r>
               <a:rPr lang="en-US" sz="2700" dirty="0" spc="-1" kern="0">
                 <a:solidFill>
-                  <a:srgbClr val="E4E1D8"/>
+                  <a:srgbClr val="F3EEE3"/>
                 </a:solidFill>
                 <a:latin typeface="Be Vietnam Pro" pitchFamily="34" charset="0"/>
                 <a:ea typeface="Be Vietnam Pro" pitchFamily="34" charset="-122"/>
@@ -4773,7 +4752,7 @@
             <a:r>
               <a:rPr lang="en-US" sz="2700" dirty="0" spc="17" kern="0">
                 <a:solidFill>
-                  <a:srgbClr val="E4E1D8"/>
+                  <a:srgbClr val="F3EEE3"/>
                 </a:solidFill>
                 <a:latin typeface="Be Vietnam Pro" pitchFamily="34" charset="0"/>
                 <a:ea typeface="Be Vietnam Pro" pitchFamily="34" charset="-122"/>
@@ -4784,7 +4763,7 @@
             <a:r>
               <a:rPr lang="en-US" sz="2700" dirty="0" spc="-1" kern="0">
                 <a:solidFill>
-                  <a:srgbClr val="E4E1D8"/>
+                  <a:srgbClr val="F3EEE3"/>
                 </a:solidFill>
                 <a:latin typeface="Be Vietnam Pro" pitchFamily="34" charset="0"/>
                 <a:ea typeface="Be Vietnam Pro" pitchFamily="34" charset="-122"/>
@@ -4796,158 +4775,182 @@
           </a:p>
           <a:p>
             <a:pPr algn="l" marL="342900" indent="-244981">
-              <a:lnSpc>
-                <a:spcPts val="3510"/>
-              </a:lnSpc>
-              <a:spcAft>
-                <a:spcPts val="1500"/>
-              </a:spcAft>
               <a:buSzPct val="100000"/>
               <a:buFont typeface="Arial"/>
               <a:buChar char="•"/>
             </a:pPr>
             <a:r>
-              <a:rPr lang="en-US" sz="2700" dirty="0" spc="-5" kern="0">
-                <a:solidFill>
-                  <a:srgbClr val="E4E1D8"/>
-                </a:solidFill>
-                <a:latin typeface="Be Vietnam Pro" pitchFamily="34" charset="0"/>
-                <a:ea typeface="Be Vietnam Pro" pitchFamily="34" charset="-122"/>
-                <a:cs typeface="Be Vietnam Pro" pitchFamily="34" charset="-120"/>
-              </a:rPr>
-              <a:t>Thiết</a:t>
+              <a:rPr lang="en-US" sz="2700" dirty="0" spc="-80" kern="0">
+                <a:solidFill>
+                  <a:srgbClr val="F3EEE3"/>
+                </a:solidFill>
+                <a:latin typeface="Be Vietnam Pro" pitchFamily="34" charset="0"/>
+                <a:ea typeface="Be Vietnam Pro" pitchFamily="34" charset="-122"/>
+                <a:cs typeface="Be Vietnam Pro" pitchFamily="34" charset="-120"/>
+              </a:rPr>
+              <a:t>Tập</a:t>
             </a:r>
             <a:r>
               <a:rPr lang="en-US" sz="2700" dirty="0" spc="-1" kern="0">
                 <a:solidFill>
-                  <a:srgbClr val="E4E1D8"/>
-                </a:solidFill>
-                <a:latin typeface="Be Vietnam Pro" pitchFamily="34" charset="0"/>
-                <a:ea typeface="Be Vietnam Pro" pitchFamily="34" charset="-122"/>
-                <a:cs typeface="Be Vietnam Pro" pitchFamily="34" charset="-120"/>
-              </a:rPr>
-              <a:t> lập</a:t>
-            </a:r>
-            <a:r>
-              <a:rPr lang="en-US" sz="2700" dirty="0" spc="-6" kern="0">
-                <a:solidFill>
-                  <a:srgbClr val="E4E1D8"/>
-                </a:solidFill>
-                <a:latin typeface="Be Vietnam Pro" pitchFamily="34" charset="0"/>
-                <a:ea typeface="Be Vietnam Pro" pitchFamily="34" charset="-122"/>
-                <a:cs typeface="Be Vietnam Pro" pitchFamily="34" charset="-120"/>
-              </a:rPr>
-              <a:t> ban</a:t>
-            </a:r>
-            <a:r>
-              <a:rPr lang="en-US" sz="2700" dirty="0" spc="13" kern="0">
-                <a:solidFill>
-                  <a:srgbClr val="E4E1D8"/>
-                </a:solidFill>
-                <a:latin typeface="Be Vietnam Pro" pitchFamily="34" charset="0"/>
-                <a:ea typeface="Be Vietnam Pro" pitchFamily="34" charset="-122"/>
-                <a:cs typeface="Be Vietnam Pro" pitchFamily="34" charset="-120"/>
-              </a:rPr>
-              <a:t> đầu</a:t>
-            </a:r>
-            <a:r>
-              <a:rPr lang="en-US" sz="2700" dirty="0" spc="6" kern="0">
-                <a:solidFill>
-                  <a:srgbClr val="E4E1D8"/>
-                </a:solidFill>
-                <a:latin typeface="Be Vietnam Pro" pitchFamily="34" charset="0"/>
-                <a:ea typeface="Be Vietnam Pro" pitchFamily="34" charset="-122"/>
-                <a:cs typeface="Be Vietnam Pro" pitchFamily="34" charset="-120"/>
-              </a:rPr>
-              <a:t> thường</a:t>
+                  <a:srgbClr val="F3EEE3"/>
+                </a:solidFill>
+                <a:latin typeface="Be Vietnam Pro" pitchFamily="34" charset="0"/>
+                <a:ea typeface="Be Vietnam Pro" pitchFamily="34" charset="-122"/>
+                <a:cs typeface="Be Vietnam Pro" pitchFamily="34" charset="-120"/>
+              </a:rPr>
+              <a:t> trung</a:t>
+            </a:r>
+            <a:r>
+              <a:rPr lang="en-US" sz="2700" dirty="0" spc="-13" kern="0">
+                <a:solidFill>
+                  <a:srgbClr val="F3EEE3"/>
+                </a:solidFill>
+                <a:latin typeface="Be Vietnam Pro" pitchFamily="34" charset="0"/>
+                <a:ea typeface="Be Vietnam Pro" pitchFamily="34" charset="-122"/>
+                <a:cs typeface="Be Vietnam Pro" pitchFamily="34" charset="-120"/>
+              </a:rPr>
+              <a:t> vào</a:t>
+            </a:r>
+            <a:r>
+              <a:rPr lang="en-US" sz="2700" dirty="0" spc="-12" kern="0">
+                <a:solidFill>
+                  <a:srgbClr val="F3EEE3"/>
+                </a:solidFill>
+                <a:latin typeface="Be Vietnam Pro" pitchFamily="34" charset="0"/>
+                <a:ea typeface="Be Vietnam Pro" pitchFamily="34" charset="-122"/>
+                <a:cs typeface="Be Vietnam Pro" pitchFamily="34" charset="-120"/>
+              </a:rPr>
+              <a:t> máy</a:t>
+            </a:r>
+            <a:r>
+              <a:rPr lang="en-US" sz="2700" dirty="0" spc="-17" kern="0">
+                <a:solidFill>
+                  <a:srgbClr val="F3EEE3"/>
+                </a:solidFill>
+                <a:latin typeface="Be Vietnam Pro" pitchFamily="34" charset="0"/>
+                <a:ea typeface="Be Vietnam Pro" pitchFamily="34" charset="-122"/>
+                <a:cs typeface="Be Vietnam Pro" pitchFamily="34" charset="-120"/>
+              </a:rPr>
+              <a:t> và</a:t>
+            </a:r>
+            <a:r>
+              <a:rPr lang="en-US" sz="2700" dirty="0" spc="-2" kern="0">
+                <a:solidFill>
+                  <a:srgbClr val="F3EEE3"/>
+                </a:solidFill>
+                <a:latin typeface="Be Vietnam Pro" pitchFamily="34" charset="0"/>
+                <a:ea typeface="Be Vietnam Pro" pitchFamily="34" charset="-122"/>
+                <a:cs typeface="Be Vietnam Pro" pitchFamily="34" charset="-120"/>
+              </a:rPr>
+              <a:t> phần</a:t>
+            </a:r>
+            <a:r>
+              <a:rPr lang="en-US" sz="2700" dirty="0" spc="-3" kern="0">
+                <a:solidFill>
+                  <a:srgbClr val="F3EEE3"/>
+                </a:solidFill>
+                <a:latin typeface="Be Vietnam Pro" pitchFamily="34" charset="0"/>
+                <a:ea typeface="Be Vietnam Pro" pitchFamily="34" charset="-122"/>
+                <a:cs typeface="Be Vietnam Pro" pitchFamily="34" charset="-120"/>
+              </a:rPr>
+              <a:t> mềm</a:t>
             </a:r>
             <a:r>
               <a:rPr lang="en-US" sz="2700" dirty="0" spc="-1" kern="0">
                 <a:solidFill>
-                  <a:srgbClr val="E4E1D8"/>
-                </a:solidFill>
-                <a:latin typeface="Be Vietnam Pro" pitchFamily="34" charset="0"/>
-                <a:ea typeface="Be Vietnam Pro" pitchFamily="34" charset="-122"/>
-                <a:cs typeface="Be Vietnam Pro" pitchFamily="34" charset="-120"/>
-              </a:rPr>
-              <a:t> làm</a:t>
-            </a:r>
-            <a:r>
-              <a:rPr lang="en-US" sz="2700" dirty="0" spc="-20" kern="0">
-                <a:solidFill>
-                  <a:srgbClr val="E4E1D8"/>
-                </a:solidFill>
-                <a:latin typeface="Be Vietnam Pro" pitchFamily="34" charset="0"/>
-                <a:ea typeface="Be Vietnam Pro" pitchFamily="34" charset="-122"/>
-                <a:cs typeface="Be Vietnam Pro" pitchFamily="34" charset="-120"/>
-              </a:rPr>
-              <a:t> tay.</a:t>
+                  <a:srgbClr val="F3EEE3"/>
+                </a:solidFill>
+                <a:latin typeface="Be Vietnam Pro" pitchFamily="34" charset="0"/>
+                <a:ea typeface="Be Vietnam Pro" pitchFamily="34" charset="-122"/>
+                <a:cs typeface="Be Vietnam Pro" pitchFamily="34" charset="-120"/>
+              </a:rPr>
+              <a:t> có</a:t>
+            </a:r>
+            <a:r>
+              <a:rPr lang="en-US" sz="2700" dirty="0" spc="-8" kern="0">
+                <a:solidFill>
+                  <a:srgbClr val="F3EEE3"/>
+                </a:solidFill>
+                <a:latin typeface="Be Vietnam Pro" pitchFamily="34" charset="0"/>
+                <a:ea typeface="Be Vietnam Pro" pitchFamily="34" charset="-122"/>
+                <a:cs typeface="Be Vietnam Pro" pitchFamily="34" charset="-120"/>
+              </a:rPr>
+              <a:t> sẵn.</a:t>
             </a:r>
             <a:endParaRPr lang="en-US" sz="2700" dirty="0"/>
           </a:p>
           <a:p>
             <a:pPr algn="l" marL="342900" indent="-244981">
-              <a:lnSpc>
-                <a:spcPts val="3510"/>
-              </a:lnSpc>
               <a:buSzPct val="100000"/>
               <a:buFont typeface="Arial"/>
               <a:buChar char="•"/>
             </a:pPr>
             <a:r>
-              <a:rPr lang="en-US" sz="2700" dirty="0" spc="0" kern="0">
-                <a:solidFill>
-                  <a:srgbClr val="E4E1D8"/>
-                </a:solidFill>
-                <a:latin typeface="Be Vietnam Pro" pitchFamily="34" charset="0"/>
-                <a:ea typeface="Be Vietnam Pro" pitchFamily="34" charset="-122"/>
-                <a:cs typeface="Be Vietnam Pro" pitchFamily="34" charset="-120"/>
-              </a:rPr>
-              <a:t>Đổi</a:t>
+              <a:rPr lang="en-US" sz="2700" dirty="0" spc="-3" kern="0">
+                <a:solidFill>
+                  <a:srgbClr val="F3EEE3"/>
+                </a:solidFill>
+                <a:latin typeface="Be Vietnam Pro" pitchFamily="34" charset="0"/>
+                <a:ea typeface="Be Vietnam Pro" pitchFamily="34" charset="-122"/>
+                <a:cs typeface="Be Vietnam Pro" pitchFamily="34" charset="-120"/>
+              </a:rPr>
+              <a:t>Puppet,</a:t>
+            </a:r>
+            <a:r>
+              <a:rPr lang="en-US" sz="2700" dirty="0" spc="2" kern="0">
+                <a:solidFill>
+                  <a:srgbClr val="F3EEE3"/>
+                </a:solidFill>
+                <a:latin typeface="Be Vietnam Pro" pitchFamily="34" charset="0"/>
+                <a:ea typeface="Be Vietnam Pro" pitchFamily="34" charset="-122"/>
+                <a:cs typeface="Be Vietnam Pro" pitchFamily="34" charset="-120"/>
+              </a:rPr>
+              <a:t> Chef,</a:t>
+            </a:r>
+            <a:r>
+              <a:rPr lang="en-US" sz="2700" dirty="0" spc="-1" kern="0">
+                <a:solidFill>
+                  <a:srgbClr val="F3EEE3"/>
+                </a:solidFill>
+                <a:latin typeface="Be Vietnam Pro" pitchFamily="34" charset="0"/>
+                <a:ea typeface="Be Vietnam Pro" pitchFamily="34" charset="-122"/>
+                <a:cs typeface="Be Vietnam Pro" pitchFamily="34" charset="-120"/>
+              </a:rPr>
+              <a:t> Ansible</a:t>
+            </a:r>
+            <a:r>
+              <a:rPr lang="en-US" sz="2700" dirty="0" spc="-2" kern="0">
+                <a:solidFill>
+                  <a:srgbClr val="F3EEE3"/>
+                </a:solidFill>
+                <a:latin typeface="Be Vietnam Pro" pitchFamily="34" charset="0"/>
+                <a:ea typeface="Be Vietnam Pro" pitchFamily="34" charset="-122"/>
+                <a:cs typeface="Be Vietnam Pro" pitchFamily="34" charset="-120"/>
+              </a:rPr>
+              <a:t> khai</a:t>
             </a:r>
             <a:r>
               <a:rPr lang="en-US" sz="2700" dirty="0" spc="-5" kern="0">
                 <a:solidFill>
-                  <a:srgbClr val="E4E1D8"/>
-                </a:solidFill>
-                <a:latin typeface="Be Vietnam Pro" pitchFamily="34" charset="0"/>
-                <a:ea typeface="Be Vietnam Pro" pitchFamily="34" charset="-122"/>
-                <a:cs typeface="Be Vietnam Pro" pitchFamily="34" charset="-120"/>
-              </a:rPr>
-              <a:t> bằng</a:t>
-            </a:r>
-            <a:r>
-              <a:rPr lang="en-US" sz="2700" dirty="0" spc="-2" kern="0">
-                <a:solidFill>
-                  <a:srgbClr val="E4E1D8"/>
-                </a:solidFill>
-                <a:latin typeface="Be Vietnam Pro" pitchFamily="34" charset="0"/>
-                <a:ea typeface="Be Vietnam Pro" pitchFamily="34" charset="-122"/>
-                <a:cs typeface="Be Vietnam Pro" pitchFamily="34" charset="-120"/>
-              </a:rPr>
-              <a:t> lệnh</a:t>
-            </a:r>
-            <a:r>
-              <a:rPr lang="en-US" sz="2700" dirty="0" spc="20" kern="0">
-                <a:solidFill>
-                  <a:srgbClr val="E4E1D8"/>
-                </a:solidFill>
-                <a:latin typeface="Be Vietnam Pro" pitchFamily="34" charset="0"/>
-                <a:ea typeface="Be Vietnam Pro" pitchFamily="34" charset="-122"/>
-                <a:cs typeface="Be Vietnam Pro" pitchFamily="34" charset="-120"/>
-              </a:rPr>
-              <a:t> từng</a:t>
+                  <a:srgbClr val="F3EEE3"/>
+                </a:solidFill>
+                <a:latin typeface="Be Vietnam Pro" pitchFamily="34" charset="0"/>
+                <a:ea typeface="Be Vietnam Pro" pitchFamily="34" charset="-122"/>
+                <a:cs typeface="Be Vietnam Pro" pitchFamily="34" charset="-120"/>
+              </a:rPr>
+              <a:t> báo</a:t>
             </a:r>
             <a:r>
               <a:rPr lang="en-US" sz="2700" dirty="0" spc="7" kern="0">
                 <a:solidFill>
-                  <a:srgbClr val="E4E1D8"/>
-                </a:solidFill>
-                <a:latin typeface="Be Vietnam Pro" pitchFamily="34" charset="0"/>
-                <a:ea typeface="Be Vietnam Pro" pitchFamily="34" charset="-122"/>
-                <a:cs typeface="Be Vietnam Pro" pitchFamily="34" charset="-120"/>
-              </a:rPr>
-              <a:t> bước.</a:t>
+                  <a:srgbClr val="F3EEE3"/>
+                </a:solidFill>
+                <a:latin typeface="Be Vietnam Pro" pitchFamily="34" charset="0"/>
+                <a:ea typeface="Be Vietnam Pro" pitchFamily="34" charset="-122"/>
+                <a:cs typeface="Be Vietnam Pro" pitchFamily="34" charset="-120"/>
+              </a:rPr>
+              <a:t> được.</a:t>
             </a:r>
             <a:endParaRPr lang="en-US" sz="2700" dirty="0"/>
           </a:p>
@@ -4955,18 +4958,18 @@
       </p:sp>
       <p:sp>
         <p:nvSpPr>
-          <p:cNvPr id="7" name="Shape 5"/>
-          <p:cNvSpPr/>
-          <p:nvPr/>
-        </p:nvSpPr>
-        <p:spPr>
-          <a:xfrm>
-            <a:off x="9372600" y="3143250"/>
-            <a:ext cx="8001000" cy="4953000"/>
+          <p:cNvPr id="6" name="Shape 4"/>
+          <p:cNvSpPr/>
+          <p:nvPr/>
+        </p:nvSpPr>
+        <p:spPr>
+          <a:xfrm>
+            <a:off x="9372600" y="3238500"/>
+            <a:ext cx="8001000" cy="4762500"/>
           </a:xfrm>
           <a:prstGeom prst="roundRect">
             <a:avLst>
-              <a:gd name="adj" fmla="val 5385"/>
+              <a:gd name="adj" fmla="val 5600"/>
             </a:avLst>
           </a:prstGeom>
           <a:solidFill>
@@ -4982,14 +4985,14 @@
       </p:sp>
       <p:sp>
         <p:nvSpPr>
-          <p:cNvPr id="8" name="Text 6"/>
-          <p:cNvSpPr/>
-          <p:nvPr/>
-        </p:nvSpPr>
-        <p:spPr>
-          <a:xfrm>
-            <a:off x="9791700" y="3524250"/>
-            <a:ext cx="7239000" cy="533400"/>
+          <p:cNvPr id="7" name="Text richtext-1792424127427-406704502"/>
+          <p:cNvSpPr/>
+          <p:nvPr/>
+        </p:nvSpPr>
+        <p:spPr>
+          <a:xfrm>
+            <a:off x="9753600" y="3524250"/>
+            <a:ext cx="7239000" cy="4191000"/>
           </a:xfrm>
           <a:prstGeom prst="rect">
             <a:avLst/>
@@ -5005,81 +5008,42 @@
               <a:buNone/>
             </a:pPr>
             <a:r>
-              <a:rPr lang="en-US" sz="2850" dirty="0" spc="-13" kern="0">
+              <a:rPr lang="en-US" sz="2700" b="1" dirty="0" spc="-6" kern="0">
                 <a:solidFill>
                   <a:srgbClr val="3DD6A0"/>
                 </a:solidFill>
-                <a:latin typeface="Be Vietnam Pro ExtraBold" pitchFamily="34" charset="0"/>
-                <a:ea typeface="Be Vietnam Pro ExtraBold" pitchFamily="34" charset="-122"/>
-                <a:cs typeface="Be Vietnam Pro ExtraBold" pitchFamily="34" charset="-120"/>
-              </a:rPr>
-              <a:t>Hạ</a:t>
-            </a:r>
-            <a:r>
-              <a:rPr lang="en-US" sz="2850" dirty="0" spc="-4" kern="0">
+                <a:latin typeface="Be Vietnam Pro" pitchFamily="34" charset="0"/>
+                <a:ea typeface="Be Vietnam Pro" pitchFamily="34" charset="-122"/>
+                <a:cs typeface="Be Vietnam Pro" pitchFamily="34" charset="-120"/>
+              </a:rPr>
+              <a:t>Hạ tầng</a:t>
+            </a:r>
+            <a:r>
+              <a:rPr lang="en-US" sz="2700" b="1" dirty="0" spc="-3" kern="0">
                 <a:solidFill>
                   <a:srgbClr val="3DD6A0"/>
                 </a:solidFill>
-                <a:latin typeface="Be Vietnam Pro ExtraBold" pitchFamily="34" charset="0"/>
-                <a:ea typeface="Be Vietnam Pro ExtraBold" pitchFamily="34" charset="-122"/>
-                <a:cs typeface="Be Vietnam Pro ExtraBold" pitchFamily="34" charset="-120"/>
-              </a:rPr>
-              <a:t> tầng</a:t>
-            </a:r>
-            <a:r>
-              <a:rPr lang="en-US" sz="2850" dirty="0" spc="-3" kern="0">
+                <a:latin typeface="Be Vietnam Pro" pitchFamily="34" charset="0"/>
+                <a:ea typeface="Be Vietnam Pro" pitchFamily="34" charset="-122"/>
+                <a:cs typeface="Be Vietnam Pro" pitchFamily="34" charset="-120"/>
+              </a:rPr>
+              <a:t> bằng</a:t>
+            </a:r>
+            <a:r>
+              <a:rPr lang="en-US" sz="2700" b="1" dirty="0" spc="-7" kern="0">
                 <a:solidFill>
                   <a:srgbClr val="3DD6A0"/>
                 </a:solidFill>
-                <a:latin typeface="Be Vietnam Pro ExtraBold" pitchFamily="34" charset="0"/>
-                <a:ea typeface="Be Vietnam Pro ExtraBold" pitchFamily="34" charset="-122"/>
-                <a:cs typeface="Be Vietnam Pro ExtraBold" pitchFamily="34" charset="-120"/>
-              </a:rPr>
-              <a:t> bằng</a:t>
-            </a:r>
-            <a:r>
-              <a:rPr lang="en-US" sz="2850" dirty="0" spc="-7" kern="0">
-                <a:solidFill>
-                  <a:srgbClr val="3DD6A0"/>
-                </a:solidFill>
-                <a:latin typeface="Be Vietnam Pro ExtraBold" pitchFamily="34" charset="0"/>
-                <a:ea typeface="Be Vietnam Pro ExtraBold" pitchFamily="34" charset="-122"/>
-                <a:cs typeface="Be Vietnam Pro ExtraBold" pitchFamily="34" charset="-120"/>
+                <a:latin typeface="Be Vietnam Pro" pitchFamily="34" charset="0"/>
+                <a:ea typeface="Be Vietnam Pro" pitchFamily="34" charset="-122"/>
+                <a:cs typeface="Be Vietnam Pro" pitchFamily="34" charset="-120"/>
               </a:rPr>
               <a:t> mã</a:t>
             </a:r>
-            <a:endParaRPr lang="en-US" sz="2850" dirty="0"/>
+            <a:endParaRPr lang="en-US" sz="2700" dirty="0"/>
           </a:p>
-        </p:txBody>
-      </p:sp>
-      <p:sp>
-        <p:nvSpPr>
-          <p:cNvPr id="9" name="Text richtext-1792421642979-200799066"/>
-          <p:cNvSpPr/>
-          <p:nvPr/>
-        </p:nvSpPr>
-        <p:spPr>
-          <a:xfrm>
-            <a:off x="9791700" y="4381500"/>
-            <a:ext cx="7239000" cy="3429000"/>
-          </a:xfrm>
-          <a:prstGeom prst="rect">
-            <a:avLst/>
-          </a:prstGeom>
-          <a:noFill/>
-          <a:ln/>
-        </p:spPr>
-        <p:txBody>
-          <a:bodyPr wrap="square" lIns="0" tIns="14573" rIns="0" bIns="-14573" rtlCol="0" anchor="t"/>
-          <a:lstStyle/>
           <a:p>
             <a:pPr algn="l" marL="342900" indent="-244981">
-              <a:lnSpc>
-                <a:spcPts val="3510"/>
-              </a:lnSpc>
-              <a:spcAft>
-                <a:spcPts val="1500"/>
-              </a:spcAft>
               <a:buSzPct val="100000"/>
               <a:buFont typeface="Arial"/>
               <a:buChar char="•"/>
@@ -5087,7 +5051,7 @@
             <a:r>
               <a:rPr lang="en-US" sz="2700" dirty="0" spc="-135" kern="0">
                 <a:solidFill>
-                  <a:srgbClr val="E4E1D8"/>
+                  <a:srgbClr val="F3EEE3"/>
                 </a:solidFill>
                 <a:latin typeface="Be Vietnam Pro" pitchFamily="34" charset="0"/>
                 <a:ea typeface="Be Vietnam Pro" pitchFamily="34" charset="-122"/>
@@ -5098,7 +5062,7 @@
             <a:r>
               <a:rPr lang="en-US" sz="2700" dirty="0" spc="9" kern="0">
                 <a:solidFill>
-                  <a:srgbClr val="E4E1D8"/>
+                  <a:srgbClr val="F3EEE3"/>
                 </a:solidFill>
                 <a:latin typeface="Be Vietnam Pro" pitchFamily="34" charset="0"/>
                 <a:ea typeface="Be Vietnam Pro" pitchFamily="34" charset="-122"/>
@@ -5109,7 +5073,7 @@
             <a:r>
               <a:rPr lang="en-US" sz="2700" dirty="0" spc="0" kern="0">
                 <a:solidFill>
-                  <a:srgbClr val="E4E1D8"/>
+                  <a:srgbClr val="F3EEE3"/>
                 </a:solidFill>
                 <a:latin typeface="Be Vietnam Pro" pitchFamily="34" charset="0"/>
                 <a:ea typeface="Be Vietnam Pro" pitchFamily="34" charset="-122"/>
@@ -5120,7 +5084,7 @@
             <a:r>
               <a:rPr lang="en-US" sz="2700" dirty="0" spc="-11" kern="0">
                 <a:solidFill>
-                  <a:srgbClr val="E4E1D8"/>
+                  <a:srgbClr val="F3EEE3"/>
                 </a:solidFill>
                 <a:latin typeface="Be Vietnam Pro" pitchFamily="34" charset="0"/>
                 <a:ea typeface="Be Vietnam Pro" pitchFamily="34" charset="-122"/>
@@ -5131,7 +5095,7 @@
             <a:r>
               <a:rPr lang="en-US" sz="2700" dirty="0" spc="-5" kern="0">
                 <a:solidFill>
-                  <a:srgbClr val="E4E1D8"/>
+                  <a:srgbClr val="F3EEE3"/>
                 </a:solidFill>
                 <a:latin typeface="Be Vietnam Pro" pitchFamily="34" charset="0"/>
                 <a:ea typeface="Be Vietnam Pro" pitchFamily="34" charset="-122"/>
@@ -5142,7 +5106,7 @@
             <a:r>
               <a:rPr lang="en-US" sz="2700" dirty="0" spc="-2" kern="0">
                 <a:solidFill>
-                  <a:srgbClr val="E4E1D8"/>
+                  <a:srgbClr val="F3EEE3"/>
                 </a:solidFill>
                 <a:latin typeface="Be Vietnam Pro" pitchFamily="34" charset="0"/>
                 <a:ea typeface="Be Vietnam Pro" pitchFamily="34" charset="-122"/>
@@ -5154,12 +5118,6 @@
           </a:p>
           <a:p>
             <a:pPr algn="l" marL="342900" indent="-244981">
-              <a:lnSpc>
-                <a:spcPts val="3510"/>
-              </a:lnSpc>
-              <a:spcAft>
-                <a:spcPts val="1500"/>
-              </a:spcAft>
               <a:buSzPct val="100000"/>
               <a:buFont typeface="Arial"/>
               <a:buChar char="•"/>
@@ -5167,7 +5125,7 @@
             <a:r>
               <a:rPr lang="en-US" sz="2700" dirty="0" spc="7" kern="0">
                 <a:solidFill>
-                  <a:srgbClr val="E4E1D8"/>
+                  <a:srgbClr val="F3EEE3"/>
                 </a:solidFill>
                 <a:latin typeface="Be Vietnam Pro" pitchFamily="34" charset="0"/>
                 <a:ea typeface="Be Vietnam Pro" pitchFamily="34" charset="-122"/>
@@ -5178,7 +5136,7 @@
             <a:r>
               <a:rPr lang="en-US" sz="2700" dirty="0" spc="-2" kern="0">
                 <a:solidFill>
-                  <a:srgbClr val="E4E1D8"/>
+                  <a:srgbClr val="F3EEE3"/>
                 </a:solidFill>
                 <a:latin typeface="Be Vietnam Pro" pitchFamily="34" charset="0"/>
                 <a:ea typeface="Be Vietnam Pro" pitchFamily="34" charset="-122"/>
@@ -5189,7 +5147,7 @@
             <a:r>
               <a:rPr lang="en-US" sz="2700" dirty="0" spc="-5" kern="0">
                 <a:solidFill>
-                  <a:srgbClr val="E4E1D8"/>
+                  <a:srgbClr val="F3EEE3"/>
                 </a:solidFill>
                 <a:latin typeface="Be Vietnam Pro" pitchFamily="34" charset="0"/>
                 <a:ea typeface="Be Vietnam Pro" pitchFamily="34" charset="-122"/>
@@ -5200,7 +5158,7 @@
             <a:r>
               <a:rPr lang="en-US" sz="2700" dirty="0" spc="-19" kern="0">
                 <a:solidFill>
-                  <a:srgbClr val="E4E1D8"/>
+                  <a:srgbClr val="F3EEE3"/>
                 </a:solidFill>
                 <a:latin typeface="Be Vietnam Pro" pitchFamily="34" charset="0"/>
                 <a:ea typeface="Be Vietnam Pro" pitchFamily="34" charset="-122"/>
@@ -5211,7 +5169,7 @@
             <a:r>
               <a:rPr lang="en-US" sz="2700" dirty="0" spc="0" kern="0">
                 <a:solidFill>
-                  <a:srgbClr val="E4E1D8"/>
+                  <a:srgbClr val="F3EEE3"/>
                 </a:solidFill>
                 <a:latin typeface="Be Vietnam Pro" pitchFamily="34" charset="0"/>
                 <a:ea typeface="Be Vietnam Pro" pitchFamily="34" charset="-122"/>
@@ -5222,7 +5180,7 @@
             <a:r>
               <a:rPr lang="en-US" sz="2700" dirty="0" spc="-3" kern="0">
                 <a:solidFill>
-                  <a:srgbClr val="E4E1D8"/>
+                  <a:srgbClr val="F3EEE3"/>
                 </a:solidFill>
                 <a:latin typeface="Be Vietnam Pro" pitchFamily="34" charset="0"/>
                 <a:ea typeface="Be Vietnam Pro" pitchFamily="34" charset="-122"/>
@@ -5233,7 +5191,7 @@
             <a:r>
               <a:rPr lang="en-US" sz="2700" dirty="0" spc="-2" kern="0">
                 <a:solidFill>
-                  <a:srgbClr val="E4E1D8"/>
+                  <a:srgbClr val="F3EEE3"/>
                 </a:solidFill>
                 <a:latin typeface="Be Vietnam Pro" pitchFamily="34" charset="0"/>
                 <a:ea typeface="Be Vietnam Pro" pitchFamily="34" charset="-122"/>
@@ -5245,9 +5203,6 @@
           </a:p>
           <a:p>
             <a:pPr algn="l" marL="342900" indent="-244981">
-              <a:lnSpc>
-                <a:spcPts val="3510"/>
-              </a:lnSpc>
               <a:buSzPct val="100000"/>
               <a:buFont typeface="Arial"/>
               <a:buChar char="•"/>
@@ -5255,7 +5210,7 @@
             <a:r>
               <a:rPr lang="en-US" sz="2700" dirty="0" spc="-82" kern="0">
                 <a:solidFill>
-                  <a:srgbClr val="E4E1D8"/>
+                  <a:srgbClr val="F3EEE3"/>
                 </a:solidFill>
                 <a:latin typeface="Be Vietnam Pro" pitchFamily="34" charset="0"/>
                 <a:ea typeface="Be Vietnam Pro" pitchFamily="34" charset="-122"/>
@@ -5266,7 +5221,7 @@
             <a:r>
               <a:rPr lang="en-US" sz="2700" dirty="0" spc="9" kern="0">
                 <a:solidFill>
-                  <a:srgbClr val="E4E1D8"/>
+                  <a:srgbClr val="F3EEE3"/>
                 </a:solidFill>
                 <a:latin typeface="Be Vietnam Pro" pitchFamily="34" charset="0"/>
                 <a:ea typeface="Be Vietnam Pro" pitchFamily="34" charset="-122"/>
@@ -5277,7 +5232,7 @@
             <a:r>
               <a:rPr lang="en-US" sz="2700" dirty="0" spc="22" kern="0">
                 <a:solidFill>
-                  <a:srgbClr val="E4E1D8"/>
+                  <a:srgbClr val="F3EEE3"/>
                 </a:solidFill>
                 <a:latin typeface="Be Vietnam Pro" pitchFamily="34" charset="0"/>
                 <a:ea typeface="Be Vietnam Pro" pitchFamily="34" charset="-122"/>
@@ -5288,7 +5243,7 @@
             <a:r>
               <a:rPr lang="en-US" sz="2700" dirty="0" spc="-3" kern="0">
                 <a:solidFill>
-                  <a:srgbClr val="E4E1D8"/>
+                  <a:srgbClr val="F3EEE3"/>
                 </a:solidFill>
                 <a:latin typeface="Be Vietnam Pro" pitchFamily="34" charset="0"/>
                 <a:ea typeface="Be Vietnam Pro" pitchFamily="34" charset="-122"/>
@@ -5299,7 +5254,7 @@
             <a:r>
               <a:rPr lang="en-US" sz="2700" dirty="0" spc="-21" kern="0">
                 <a:solidFill>
-                  <a:srgbClr val="E4E1D8"/>
+                  <a:srgbClr val="F3EEE3"/>
                 </a:solidFill>
                 <a:latin typeface="Be Vietnam Pro" pitchFamily="34" charset="0"/>
                 <a:ea typeface="Be Vietnam Pro" pitchFamily="34" charset="-122"/>
@@ -5310,7 +5265,7 @@
             <a:r>
               <a:rPr lang="en-US" sz="2700" dirty="0" spc="-1" kern="0">
                 <a:solidFill>
-                  <a:srgbClr val="E4E1D8"/>
+                  <a:srgbClr val="F3EEE3"/>
                 </a:solidFill>
                 <a:latin typeface="Be Vietnam Pro" pitchFamily="34" charset="0"/>
                 <a:ea typeface="Be Vietnam Pro" pitchFamily="34" charset="-122"/>
@@ -5321,7 +5276,7 @@
             <a:r>
               <a:rPr lang="en-US" sz="2700" dirty="0" spc="-2" kern="0">
                 <a:solidFill>
-                  <a:srgbClr val="E4E1D8"/>
+                  <a:srgbClr val="F3EEE3"/>
                 </a:solidFill>
                 <a:latin typeface="Be Vietnam Pro" pitchFamily="34" charset="0"/>
                 <a:ea typeface="Be Vietnam Pro" pitchFamily="34" charset="-122"/>
@@ -5335,7 +5290,7 @@
       </p:sp>
       <p:sp>
         <p:nvSpPr>
-          <p:cNvPr id="10" name="Shape 8"/>
+          <p:cNvPr id="8" name="Shape 6"/>
           <p:cNvSpPr/>
           <p:nvPr/>
         </p:nvSpPr>
@@ -5360,7 +5315,7 @@
       </p:sp>
       <p:sp>
         <p:nvSpPr>
-          <p:cNvPr id="11" name="Shape 9"/>
+          <p:cNvPr id="9" name="Shape 7"/>
           <p:cNvSpPr/>
           <p:nvPr/>
         </p:nvSpPr>
@@ -5385,7 +5340,7 @@
       </p:sp>
       <p:sp>
         <p:nvSpPr>
-          <p:cNvPr id="12" name="Shape 10"/>
+          <p:cNvPr id="10" name="Shape 8"/>
           <p:cNvSpPr/>
           <p:nvPr/>
         </p:nvSpPr>
@@ -5410,7 +5365,7 @@
       </p:sp>
       <p:sp>
         <p:nvSpPr>
-          <p:cNvPr id="13" name="Shape 11"/>
+          <p:cNvPr id="11" name="Shape 9"/>
           <p:cNvSpPr/>
           <p:nvPr/>
         </p:nvSpPr>
@@ -5435,7 +5390,7 @@
       </p:sp>
       <p:sp>
         <p:nvSpPr>
-          <p:cNvPr id="14" name="Shape 12"/>
+          <p:cNvPr id="12" name="Shape 10"/>
           <p:cNvSpPr/>
           <p:nvPr/>
         </p:nvSpPr>
@@ -5460,7 +5415,7 @@
       </p:sp>
       <p:sp>
         <p:nvSpPr>
-          <p:cNvPr id="15" name="Shape 13"/>
+          <p:cNvPr id="13" name="Shape 11"/>
           <p:cNvSpPr/>
           <p:nvPr/>
         </p:nvSpPr>
@@ -5485,7 +5440,7 @@
       </p:sp>
       <p:sp>
         <p:nvSpPr>
-          <p:cNvPr id="16" name="Shape 14"/>
+          <p:cNvPr id="14" name="Shape 12"/>
           <p:cNvSpPr/>
           <p:nvPr/>
         </p:nvSpPr>
@@ -5510,7 +5465,7 @@
       </p:sp>
       <p:sp>
         <p:nvSpPr>
-          <p:cNvPr id="17" name="Shape 15"/>
+          <p:cNvPr id="15" name="Shape 13"/>
           <p:cNvSpPr/>
           <p:nvPr/>
         </p:nvSpPr>
@@ -5535,7 +5490,7 @@
       </p:sp>
       <p:sp>
         <p:nvSpPr>
-          <p:cNvPr id="18" name="Text 16"/>
+          <p:cNvPr id="16" name="Text 14"/>
           <p:cNvSpPr/>
           <p:nvPr/>
         </p:nvSpPr>
@@ -5651,7 +5606,7 @@
       </p:sp>
       <p:sp>
         <p:nvSpPr>
-          <p:cNvPr id="19" name="Shape 17"/>
+          <p:cNvPr id="17" name="Shape 15"/>
           <p:cNvSpPr/>
           <p:nvPr/>
         </p:nvSpPr>
@@ -5675,7 +5630,7 @@
       </p:sp>
       <p:pic>
         <p:nvPicPr>
-          <p:cNvPr id="20" name="Moda image moda-export-watermark-e11bc0c1-44db-487c-ac67-2fc5f820d679" descr="">    </p:cNvPr>
+          <p:cNvPr id="18" name="Moda image moda-export-watermark-e11bc0c1-44db-487c-ac67-2fc5f820d679" descr="">    </p:cNvPr>
           <p:cNvPicPr>
             <a:picLocks noChangeAspect="1"/>
           </p:cNvPicPr>
